--- a/Manuel PBI DAX/Copies écran/Copies Ecrans PBI-DAX.pptx
+++ b/Manuel PBI DAX/Copies écran/Copies Ecrans PBI-DAX.pptx
@@ -6,6 +6,7 @@
   </p:sldMasterIdLst>
   <p:sldIdLst>
     <p:sldId id="256" r:id="rId2"/>
+    <p:sldId id="257" r:id="rId3"/>
   </p:sldIdLst>
   <p:sldSz cx="12192000" cy="6858000"/>
   <p:notesSz cx="6858000" cy="9144000"/>
@@ -104,7 +105,20 @@
       </a:defRPr>
     </a:lvl9pPr>
   </p:defaultTextStyle>
+  <p:extLst>
+    <p:ext uri="{EFAFB233-063F-42B5-8137-9DF3F51BA10A}">
+      <p15:sldGuideLst xmlns:p15="http://schemas.microsoft.com/office/powerpoint/2012/main"/>
+    </p:ext>
+  </p:extLst>
 </p:presentation>
+</file>
+
+<file path=ppt/revisionInfo.xml><?xml version="1.0" encoding="utf-8"?>
+<p1510:revInfo xmlns:a="http://schemas.openxmlformats.org/drawingml/2006/main" xmlns:r="http://schemas.openxmlformats.org/officeDocument/2006/relationships" xmlns:p1510="http://schemas.microsoft.com/office/powerpoint/2015/10/main">
+  <p1510:revLst>
+    <p1510:client id="{F16AEA60-946D-4A41-8817-464C6DB9E432}" v="9" dt="2026-04-23T14:26:10.250"/>
+  </p1510:revLst>
+</p1510:revInfo>
 </file>
 
 <file path=ppt/changesInfos/changesInfo1.xml><?xml version="1.0" encoding="utf-8"?>
@@ -112,38 +126,205 @@
   <pc:docChgLst>
     <pc:chgData name="Olivier Aillery" userId="47a17e10-e073-432e-996d-75ebd20bd498" providerId="ADAL" clId="{9BC8EA7A-B910-4B92-8E4E-80B2EC870E16}"/>
     <pc:docChg chg="custSel addSld modSld">
-      <pc:chgData name="Olivier Aillery" userId="47a17e10-e073-432e-996d-75ebd20bd498" providerId="ADAL" clId="{9BC8EA7A-B910-4B92-8E4E-80B2EC870E16}" dt="2026-04-21T09:44:42.734" v="5" actId="732"/>
+      <pc:chgData name="Olivier Aillery" userId="47a17e10-e073-432e-996d-75ebd20bd498" providerId="ADAL" clId="{9BC8EA7A-B910-4B92-8E4E-80B2EC870E16}" dt="2026-04-23T14:36:55.175" v="52" actId="1076"/>
       <pc:docMkLst>
         <pc:docMk/>
       </pc:docMkLst>
       <pc:sldChg chg="addSp delSp modSp new mod">
-        <pc:chgData name="Olivier Aillery" userId="47a17e10-e073-432e-996d-75ebd20bd498" providerId="ADAL" clId="{9BC8EA7A-B910-4B92-8E4E-80B2EC870E16}" dt="2026-04-21T09:44:42.734" v="5" actId="732"/>
+        <pc:chgData name="Olivier Aillery" userId="47a17e10-e073-432e-996d-75ebd20bd498" providerId="ADAL" clId="{9BC8EA7A-B910-4B92-8E4E-80B2EC870E16}" dt="2026-04-23T06:33:22.405" v="29" actId="1038"/>
         <pc:sldMkLst>
           <pc:docMk/>
           <pc:sldMk cId="2779423324" sldId="256"/>
         </pc:sldMkLst>
-        <pc:spChg chg="del">
-          <ac:chgData name="Olivier Aillery" userId="47a17e10-e073-432e-996d-75ebd20bd498" providerId="ADAL" clId="{9BC8EA7A-B910-4B92-8E4E-80B2EC870E16}" dt="2026-04-21T09:43:42.236" v="1" actId="478"/>
+        <pc:spChg chg="add mod">
+          <ac:chgData name="Olivier Aillery" userId="47a17e10-e073-432e-996d-75ebd20bd498" providerId="ADAL" clId="{9BC8EA7A-B910-4B92-8E4E-80B2EC870E16}" dt="2026-04-23T06:32:29" v="16" actId="1582"/>
           <ac:spMkLst>
             <pc:docMk/>
             <pc:sldMk cId="2779423324" sldId="256"/>
-            <ac:spMk id="2" creationId="{14C78F87-2237-12B4-7841-FCFE335C6D51}"/>
+            <ac:spMk id="9" creationId="{CA432DF5-1BA3-A444-35EE-5652838C3F41}"/>
           </ac:spMkLst>
         </pc:spChg>
-        <pc:spChg chg="del">
-          <ac:chgData name="Olivier Aillery" userId="47a17e10-e073-432e-996d-75ebd20bd498" providerId="ADAL" clId="{9BC8EA7A-B910-4B92-8E4E-80B2EC870E16}" dt="2026-04-21T09:43:43.755" v="2" actId="478"/>
+        <pc:spChg chg="add mod">
+          <ac:chgData name="Olivier Aillery" userId="47a17e10-e073-432e-996d-75ebd20bd498" providerId="ADAL" clId="{9BC8EA7A-B910-4B92-8E4E-80B2EC870E16}" dt="2026-04-23T06:32:35.540" v="18" actId="1076"/>
           <ac:spMkLst>
             <pc:docMk/>
             <pc:sldMk cId="2779423324" sldId="256"/>
-            <ac:spMk id="3" creationId="{B48F4417-2C7C-B4C5-C838-78FCC301FE34}"/>
+            <ac:spMk id="10" creationId="{7073B894-E066-C34C-E1BE-087F249D7D9B}"/>
           </ac:spMkLst>
         </pc:spChg>
+        <pc:spChg chg="add mod">
+          <ac:chgData name="Olivier Aillery" userId="47a17e10-e073-432e-996d-75ebd20bd498" providerId="ADAL" clId="{9BC8EA7A-B910-4B92-8E4E-80B2EC870E16}" dt="2026-04-23T06:33:11.034" v="22" actId="14100"/>
+          <ac:spMkLst>
+            <pc:docMk/>
+            <pc:sldMk cId="2779423324" sldId="256"/>
+            <ac:spMk id="11" creationId="{CA3B4466-6C8E-EE87-70A4-04F5CF30E6D2}"/>
+          </ac:spMkLst>
+        </pc:spChg>
+        <pc:spChg chg="add mod">
+          <ac:chgData name="Olivier Aillery" userId="47a17e10-e073-432e-996d-75ebd20bd498" providerId="ADAL" clId="{9BC8EA7A-B910-4B92-8E4E-80B2EC870E16}" dt="2026-04-23T06:33:22.405" v="29" actId="1038"/>
+          <ac:spMkLst>
+            <pc:docMk/>
+            <pc:sldMk cId="2779423324" sldId="256"/>
+            <ac:spMk id="12" creationId="{6EC9C408-8D20-2D1C-699B-A7C711CBBEA1}"/>
+          </ac:spMkLst>
+        </pc:spChg>
+        <pc:picChg chg="add del mod">
+          <ac:chgData name="Olivier Aillery" userId="47a17e10-e073-432e-996d-75ebd20bd498" providerId="ADAL" clId="{9BC8EA7A-B910-4B92-8E4E-80B2EC870E16}" dt="2026-04-23T06:31:04.289" v="8" actId="478"/>
+          <ac:picMkLst>
+            <pc:docMk/>
+            <pc:sldMk cId="2779423324" sldId="256"/>
+            <ac:picMk id="3" creationId="{9E8135D4-78F5-5E98-C759-6764F8E03FA9}"/>
+          </ac:picMkLst>
+        </pc:picChg>
         <pc:picChg chg="add mod modCrop">
           <ac:chgData name="Olivier Aillery" userId="47a17e10-e073-432e-996d-75ebd20bd498" providerId="ADAL" clId="{9BC8EA7A-B910-4B92-8E4E-80B2EC870E16}" dt="2026-04-21T09:44:42.734" v="5" actId="732"/>
           <ac:picMkLst>
             <pc:docMk/>
             <pc:sldMk cId="2779423324" sldId="256"/>
             <ac:picMk id="5" creationId="{221FC35B-A61F-5CA5-7A7B-D94A04D82429}"/>
+          </ac:picMkLst>
+        </pc:picChg>
+        <pc:picChg chg="add mod">
+          <ac:chgData name="Olivier Aillery" userId="47a17e10-e073-432e-996d-75ebd20bd498" providerId="ADAL" clId="{9BC8EA7A-B910-4B92-8E4E-80B2EC870E16}" dt="2026-04-23T06:31:34.213" v="10" actId="1076"/>
+          <ac:picMkLst>
+            <pc:docMk/>
+            <pc:sldMk cId="2779423324" sldId="256"/>
+            <ac:picMk id="6" creationId="{0C98E1B4-DABD-CF25-C236-AEBC043C6BA5}"/>
+          </ac:picMkLst>
+        </pc:picChg>
+        <pc:picChg chg="add mod">
+          <ac:chgData name="Olivier Aillery" userId="47a17e10-e073-432e-996d-75ebd20bd498" providerId="ADAL" clId="{9BC8EA7A-B910-4B92-8E4E-80B2EC870E16}" dt="2026-04-23T06:31:41.109" v="12" actId="1076"/>
+          <ac:picMkLst>
+            <pc:docMk/>
+            <pc:sldMk cId="2779423324" sldId="256"/>
+            <ac:picMk id="8" creationId="{C4623799-0110-87B3-4B5B-9DA51E225111}"/>
+          </ac:picMkLst>
+        </pc:picChg>
+      </pc:sldChg>
+      <pc:sldChg chg="addSp delSp modSp new mod">
+        <pc:chgData name="Olivier Aillery" userId="47a17e10-e073-432e-996d-75ebd20bd498" providerId="ADAL" clId="{9BC8EA7A-B910-4B92-8E4E-80B2EC870E16}" dt="2026-04-23T14:36:55.175" v="52" actId="1076"/>
+        <pc:sldMkLst>
+          <pc:docMk/>
+          <pc:sldMk cId="352205092" sldId="257"/>
+        </pc:sldMkLst>
+        <pc:spChg chg="del">
+          <ac:chgData name="Olivier Aillery" userId="47a17e10-e073-432e-996d-75ebd20bd498" providerId="ADAL" clId="{9BC8EA7A-B910-4B92-8E4E-80B2EC870E16}" dt="2026-04-23T06:44:32.518" v="32" actId="478"/>
+          <ac:spMkLst>
+            <pc:docMk/>
+            <pc:sldMk cId="352205092" sldId="257"/>
+            <ac:spMk id="2" creationId="{D61C7A03-5D70-955A-4C01-95B654609242}"/>
+          </ac:spMkLst>
+        </pc:spChg>
+        <pc:spChg chg="del">
+          <ac:chgData name="Olivier Aillery" userId="47a17e10-e073-432e-996d-75ebd20bd498" providerId="ADAL" clId="{9BC8EA7A-B910-4B92-8E4E-80B2EC870E16}" dt="2026-04-23T06:44:30.886" v="31" actId="478"/>
+          <ac:spMkLst>
+            <pc:docMk/>
+            <pc:sldMk cId="352205092" sldId="257"/>
+            <ac:spMk id="3" creationId="{F863CBF3-729A-1E54-70C9-FF66730D01EB}"/>
+          </ac:spMkLst>
+        </pc:spChg>
+        <pc:spChg chg="add del">
+          <ac:chgData name="Olivier Aillery" userId="47a17e10-e073-432e-996d-75ebd20bd498" providerId="ADAL" clId="{9BC8EA7A-B910-4B92-8E4E-80B2EC870E16}" dt="2026-04-23T14:23:16.137" v="42" actId="478"/>
+          <ac:spMkLst>
+            <pc:docMk/>
+            <pc:sldMk cId="352205092" sldId="257"/>
+            <ac:spMk id="11" creationId="{4684FD40-08C1-0EF6-A763-838A11E74B2F}"/>
+          </ac:spMkLst>
+        </pc:spChg>
+        <pc:spChg chg="add mod">
+          <ac:chgData name="Olivier Aillery" userId="47a17e10-e073-432e-996d-75ebd20bd498" providerId="ADAL" clId="{9BC8EA7A-B910-4B92-8E4E-80B2EC870E16}" dt="2026-04-23T14:24:03.293" v="49" actId="164"/>
+          <ac:spMkLst>
+            <pc:docMk/>
+            <pc:sldMk cId="352205092" sldId="257"/>
+            <ac:spMk id="12" creationId="{FA911E64-C349-482A-1298-731060E0A3E6}"/>
+          </ac:spMkLst>
+        </pc:spChg>
+        <pc:spChg chg="add mod">
+          <ac:chgData name="Olivier Aillery" userId="47a17e10-e073-432e-996d-75ebd20bd498" providerId="ADAL" clId="{9BC8EA7A-B910-4B92-8E4E-80B2EC870E16}" dt="2026-04-23T14:24:03.293" v="49" actId="164"/>
+          <ac:spMkLst>
+            <pc:docMk/>
+            <pc:sldMk cId="352205092" sldId="257"/>
+            <ac:spMk id="13" creationId="{F82B3A42-66B8-D1CB-0155-B935FEF05C37}"/>
+          </ac:spMkLst>
+        </pc:spChg>
+        <pc:spChg chg="mod">
+          <ac:chgData name="Olivier Aillery" userId="47a17e10-e073-432e-996d-75ebd20bd498" providerId="ADAL" clId="{9BC8EA7A-B910-4B92-8E4E-80B2EC870E16}" dt="2026-04-23T14:26:07.999" v="50"/>
+          <ac:spMkLst>
+            <pc:docMk/>
+            <pc:sldMk cId="352205092" sldId="257"/>
+            <ac:spMk id="17" creationId="{1EA522A0-AF87-7351-ECC5-F8EDDE43892F}"/>
+          </ac:spMkLst>
+        </pc:spChg>
+        <pc:spChg chg="mod">
+          <ac:chgData name="Olivier Aillery" userId="47a17e10-e073-432e-996d-75ebd20bd498" providerId="ADAL" clId="{9BC8EA7A-B910-4B92-8E4E-80B2EC870E16}" dt="2026-04-23T14:26:07.999" v="50"/>
+          <ac:spMkLst>
+            <pc:docMk/>
+            <pc:sldMk cId="352205092" sldId="257"/>
+            <ac:spMk id="18" creationId="{D24F211E-AB1E-2908-1907-EE6CBDFB90FD}"/>
+          </ac:spMkLst>
+        </pc:spChg>
+        <pc:grpChg chg="add mod">
+          <ac:chgData name="Olivier Aillery" userId="47a17e10-e073-432e-996d-75ebd20bd498" providerId="ADAL" clId="{9BC8EA7A-B910-4B92-8E4E-80B2EC870E16}" dt="2026-04-23T14:24:03.293" v="49" actId="164"/>
+          <ac:grpSpMkLst>
+            <pc:docMk/>
+            <pc:sldMk cId="352205092" sldId="257"/>
+            <ac:grpSpMk id="14" creationId="{5AAEF236-1788-828C-EDB6-0E292DF4363E}"/>
+          </ac:grpSpMkLst>
+        </pc:grpChg>
+        <pc:grpChg chg="add mod">
+          <ac:chgData name="Olivier Aillery" userId="47a17e10-e073-432e-996d-75ebd20bd498" providerId="ADAL" clId="{9BC8EA7A-B910-4B92-8E4E-80B2EC870E16}" dt="2026-04-23T14:26:07.999" v="50"/>
+          <ac:grpSpMkLst>
+            <pc:docMk/>
+            <pc:sldMk cId="352205092" sldId="257"/>
+            <ac:grpSpMk id="15" creationId="{6CBFA18D-869A-6911-CD4C-CF04047F279D}"/>
+          </ac:grpSpMkLst>
+        </pc:grpChg>
+        <pc:picChg chg="add mod">
+          <ac:chgData name="Olivier Aillery" userId="47a17e10-e073-432e-996d-75ebd20bd498" providerId="ADAL" clId="{9BC8EA7A-B910-4B92-8E4E-80B2EC870E16}" dt="2026-04-23T11:26:31.640" v="34" actId="1076"/>
+          <ac:picMkLst>
+            <pc:docMk/>
+            <pc:sldMk cId="352205092" sldId="257"/>
+            <ac:picMk id="5" creationId="{1DE9494B-B9B3-4E54-E265-87988B4DFD56}"/>
+          </ac:picMkLst>
+        </pc:picChg>
+        <pc:picChg chg="add mod">
+          <ac:chgData name="Olivier Aillery" userId="47a17e10-e073-432e-996d-75ebd20bd498" providerId="ADAL" clId="{9BC8EA7A-B910-4B92-8E4E-80B2EC870E16}" dt="2026-04-23T13:34:08.320" v="35" actId="931"/>
+          <ac:picMkLst>
+            <pc:docMk/>
+            <pc:sldMk cId="352205092" sldId="257"/>
+            <ac:picMk id="7" creationId="{0839AA3E-E03D-2560-5550-C9DF3598F075}"/>
+          </ac:picMkLst>
+        </pc:picChg>
+        <pc:picChg chg="add mod modCrop">
+          <ac:chgData name="Olivier Aillery" userId="47a17e10-e073-432e-996d-75ebd20bd498" providerId="ADAL" clId="{9BC8EA7A-B910-4B92-8E4E-80B2EC870E16}" dt="2026-04-23T14:15:43.827" v="38" actId="732"/>
+          <ac:picMkLst>
+            <pc:docMk/>
+            <pc:sldMk cId="352205092" sldId="257"/>
+            <ac:picMk id="8" creationId="{6D31A79D-6FDE-8BBF-3030-ECC0204A2AE5}"/>
+          </ac:picMkLst>
+        </pc:picChg>
+        <pc:picChg chg="add mod">
+          <ac:chgData name="Olivier Aillery" userId="47a17e10-e073-432e-996d-75ebd20bd498" providerId="ADAL" clId="{9BC8EA7A-B910-4B92-8E4E-80B2EC870E16}" dt="2026-04-23T14:24:03.293" v="49" actId="164"/>
+          <ac:picMkLst>
+            <pc:docMk/>
+            <pc:sldMk cId="352205092" sldId="257"/>
+            <ac:picMk id="10" creationId="{DD3B213E-6233-1D5A-1FF3-192CB1D7D214}"/>
+          </ac:picMkLst>
+        </pc:picChg>
+        <pc:picChg chg="mod">
+          <ac:chgData name="Olivier Aillery" userId="47a17e10-e073-432e-996d-75ebd20bd498" providerId="ADAL" clId="{9BC8EA7A-B910-4B92-8E4E-80B2EC870E16}" dt="2026-04-23T14:26:07.999" v="50"/>
+          <ac:picMkLst>
+            <pc:docMk/>
+            <pc:sldMk cId="352205092" sldId="257"/>
+            <ac:picMk id="16" creationId="{7A469983-8399-225B-CFD2-E1D286FC90B7}"/>
+          </ac:picMkLst>
+        </pc:picChg>
+        <pc:picChg chg="add mod">
+          <ac:chgData name="Olivier Aillery" userId="47a17e10-e073-432e-996d-75ebd20bd498" providerId="ADAL" clId="{9BC8EA7A-B910-4B92-8E4E-80B2EC870E16}" dt="2026-04-23T14:36:55.175" v="52" actId="1076"/>
+          <ac:picMkLst>
+            <pc:docMk/>
+            <pc:sldMk cId="352205092" sldId="257"/>
+            <ac:picMk id="20" creationId="{6DD06F6D-1959-A140-3A5D-CB4651DFB998}"/>
           </ac:picMkLst>
         </pc:picChg>
       </pc:sldChg>
@@ -299,7 +480,7 @@
           <a:p>
             <a:fld id="{F6F63B94-301D-4EBE-8DDE-D19B64923BA9}" type="datetimeFigureOut">
               <a:rPr lang="fr-FR" smtClean="0"/>
-              <a:t>21/04/2026</a:t>
+              <a:t>23/04/2026</a:t>
             </a:fld>
             <a:endParaRPr lang="fr-FR"/>
           </a:p>
@@ -497,7 +678,7 @@
           <a:p>
             <a:fld id="{F6F63B94-301D-4EBE-8DDE-D19B64923BA9}" type="datetimeFigureOut">
               <a:rPr lang="fr-FR" smtClean="0"/>
-              <a:t>21/04/2026</a:t>
+              <a:t>23/04/2026</a:t>
             </a:fld>
             <a:endParaRPr lang="fr-FR"/>
           </a:p>
@@ -705,7 +886,7 @@
           <a:p>
             <a:fld id="{F6F63B94-301D-4EBE-8DDE-D19B64923BA9}" type="datetimeFigureOut">
               <a:rPr lang="fr-FR" smtClean="0"/>
-              <a:t>21/04/2026</a:t>
+              <a:t>23/04/2026</a:t>
             </a:fld>
             <a:endParaRPr lang="fr-FR"/>
           </a:p>
@@ -903,7 +1084,7 @@
           <a:p>
             <a:fld id="{F6F63B94-301D-4EBE-8DDE-D19B64923BA9}" type="datetimeFigureOut">
               <a:rPr lang="fr-FR" smtClean="0"/>
-              <a:t>21/04/2026</a:t>
+              <a:t>23/04/2026</a:t>
             </a:fld>
             <a:endParaRPr lang="fr-FR"/>
           </a:p>
@@ -1178,7 +1359,7 @@
           <a:p>
             <a:fld id="{F6F63B94-301D-4EBE-8DDE-D19B64923BA9}" type="datetimeFigureOut">
               <a:rPr lang="fr-FR" smtClean="0"/>
-              <a:t>21/04/2026</a:t>
+              <a:t>23/04/2026</a:t>
             </a:fld>
             <a:endParaRPr lang="fr-FR"/>
           </a:p>
@@ -1443,7 +1624,7 @@
           <a:p>
             <a:fld id="{F6F63B94-301D-4EBE-8DDE-D19B64923BA9}" type="datetimeFigureOut">
               <a:rPr lang="fr-FR" smtClean="0"/>
-              <a:t>21/04/2026</a:t>
+              <a:t>23/04/2026</a:t>
             </a:fld>
             <a:endParaRPr lang="fr-FR"/>
           </a:p>
@@ -1855,7 +2036,7 @@
           <a:p>
             <a:fld id="{F6F63B94-301D-4EBE-8DDE-D19B64923BA9}" type="datetimeFigureOut">
               <a:rPr lang="fr-FR" smtClean="0"/>
-              <a:t>21/04/2026</a:t>
+              <a:t>23/04/2026</a:t>
             </a:fld>
             <a:endParaRPr lang="fr-FR"/>
           </a:p>
@@ -1996,7 +2177,7 @@
           <a:p>
             <a:fld id="{F6F63B94-301D-4EBE-8DDE-D19B64923BA9}" type="datetimeFigureOut">
               <a:rPr lang="fr-FR" smtClean="0"/>
-              <a:t>21/04/2026</a:t>
+              <a:t>23/04/2026</a:t>
             </a:fld>
             <a:endParaRPr lang="fr-FR"/>
           </a:p>
@@ -2109,7 +2290,7 @@
           <a:p>
             <a:fld id="{F6F63B94-301D-4EBE-8DDE-D19B64923BA9}" type="datetimeFigureOut">
               <a:rPr lang="fr-FR" smtClean="0"/>
-              <a:t>21/04/2026</a:t>
+              <a:t>23/04/2026</a:t>
             </a:fld>
             <a:endParaRPr lang="fr-FR"/>
           </a:p>
@@ -2420,7 +2601,7 @@
           <a:p>
             <a:fld id="{F6F63B94-301D-4EBE-8DDE-D19B64923BA9}" type="datetimeFigureOut">
               <a:rPr lang="fr-FR" smtClean="0"/>
-              <a:t>21/04/2026</a:t>
+              <a:t>23/04/2026</a:t>
             </a:fld>
             <a:endParaRPr lang="fr-FR"/>
           </a:p>
@@ -2708,7 +2889,7 @@
           <a:p>
             <a:fld id="{F6F63B94-301D-4EBE-8DDE-D19B64923BA9}" type="datetimeFigureOut">
               <a:rPr lang="fr-FR" smtClean="0"/>
-              <a:t>21/04/2026</a:t>
+              <a:t>23/04/2026</a:t>
             </a:fld>
             <a:endParaRPr lang="fr-FR"/>
           </a:p>
@@ -2949,7 +3130,7 @@
           <a:p>
             <a:fld id="{F6F63B94-301D-4EBE-8DDE-D19B64923BA9}" type="datetimeFigureOut">
               <a:rPr lang="fr-FR" smtClean="0"/>
-              <a:t>21/04/2026</a:t>
+              <a:t>23/04/2026</a:t>
             </a:fld>
             <a:endParaRPr lang="fr-FR"/>
           </a:p>
@@ -3403,10 +3584,620 @@
           </a:prstGeom>
         </p:spPr>
       </p:pic>
+      <p:pic>
+        <p:nvPicPr>
+          <p:cNvPr id="6" name="Image 5">
+            <a:extLst>
+              <a:ext uri="{FF2B5EF4-FFF2-40B4-BE49-F238E27FC236}">
+                <a16:creationId xmlns:a16="http://schemas.microsoft.com/office/drawing/2014/main" id="{0C98E1B4-DABD-CF25-C236-AEBC043C6BA5}"/>
+              </a:ext>
+            </a:extLst>
+          </p:cNvPr>
+          <p:cNvPicPr>
+            <a:picLocks noChangeAspect="1"/>
+          </p:cNvPicPr>
+          <p:nvPr/>
+        </p:nvPicPr>
+        <p:blipFill>
+          <a:blip r:embed="rId3"/>
+          <a:stretch>
+            <a:fillRect/>
+          </a:stretch>
+        </p:blipFill>
+        <p:spPr>
+          <a:xfrm>
+            <a:off x="256360" y="1065865"/>
+            <a:ext cx="9745435" cy="2476846"/>
+          </a:xfrm>
+          <a:prstGeom prst="rect">
+            <a:avLst/>
+          </a:prstGeom>
+        </p:spPr>
+      </p:pic>
+      <p:pic>
+        <p:nvPicPr>
+          <p:cNvPr id="8" name="Image 7">
+            <a:extLst>
+              <a:ext uri="{FF2B5EF4-FFF2-40B4-BE49-F238E27FC236}">
+                <a16:creationId xmlns:a16="http://schemas.microsoft.com/office/drawing/2014/main" id="{C4623799-0110-87B3-4B5B-9DA51E225111}"/>
+              </a:ext>
+            </a:extLst>
+          </p:cNvPr>
+          <p:cNvPicPr>
+            <a:picLocks noChangeAspect="1"/>
+          </p:cNvPicPr>
+          <p:nvPr/>
+        </p:nvPicPr>
+        <p:blipFill>
+          <a:blip r:embed="rId4"/>
+          <a:stretch>
+            <a:fillRect/>
+          </a:stretch>
+        </p:blipFill>
+        <p:spPr>
+          <a:xfrm>
+            <a:off x="256360" y="3542711"/>
+            <a:ext cx="9745435" cy="2429214"/>
+          </a:xfrm>
+          <a:prstGeom prst="rect">
+            <a:avLst/>
+          </a:prstGeom>
+        </p:spPr>
+      </p:pic>
+      <p:sp>
+        <p:nvSpPr>
+          <p:cNvPr id="9" name="Rectangle : coins arrondis 8">
+            <a:extLst>
+              <a:ext uri="{FF2B5EF4-FFF2-40B4-BE49-F238E27FC236}">
+                <a16:creationId xmlns:a16="http://schemas.microsoft.com/office/drawing/2014/main" id="{CA432DF5-1BA3-A444-35EE-5652838C3F41}"/>
+              </a:ext>
+            </a:extLst>
+          </p:cNvPr>
+          <p:cNvSpPr/>
+          <p:nvPr/>
+        </p:nvSpPr>
+        <p:spPr>
+          <a:xfrm>
+            <a:off x="2185416" y="2569464"/>
+            <a:ext cx="4462272" cy="246888"/>
+          </a:xfrm>
+          <a:prstGeom prst="roundRect">
+            <a:avLst/>
+          </a:prstGeom>
+          <a:noFill/>
+          <a:ln w="28575" cap="flat" cmpd="sng" algn="ctr">
+            <a:solidFill>
+              <a:srgbClr val="FF0000"/>
+            </a:solidFill>
+            <a:prstDash val="solid"/>
+            <a:round/>
+            <a:headEnd type="none" w="med" len="med"/>
+            <a:tailEnd type="none" w="med" len="med"/>
+          </a:ln>
+        </p:spPr>
+        <p:style>
+          <a:lnRef idx="0">
+            <a:scrgbClr r="0" g="0" b="0"/>
+          </a:lnRef>
+          <a:fillRef idx="0">
+            <a:scrgbClr r="0" g="0" b="0"/>
+          </a:fillRef>
+          <a:effectRef idx="0">
+            <a:scrgbClr r="0" g="0" b="0"/>
+          </a:effectRef>
+          <a:fontRef idx="minor">
+            <a:schemeClr val="accent2"/>
+          </a:fontRef>
+        </p:style>
+        <p:txBody>
+          <a:bodyPr rtlCol="0" anchor="ctr"/>
+          <a:lstStyle/>
+          <a:p>
+            <a:pPr algn="ctr"/>
+            <a:endParaRPr lang="fr-FR"/>
+          </a:p>
+        </p:txBody>
+      </p:sp>
+      <p:sp>
+        <p:nvSpPr>
+          <p:cNvPr id="10" name="Rectangle : coins arrondis 9">
+            <a:extLst>
+              <a:ext uri="{FF2B5EF4-FFF2-40B4-BE49-F238E27FC236}">
+                <a16:creationId xmlns:a16="http://schemas.microsoft.com/office/drawing/2014/main" id="{7073B894-E066-C34C-E1BE-087F249D7D9B}"/>
+              </a:ext>
+            </a:extLst>
+          </p:cNvPr>
+          <p:cNvSpPr/>
+          <p:nvPr/>
+        </p:nvSpPr>
+        <p:spPr>
+          <a:xfrm>
+            <a:off x="2185416" y="4525670"/>
+            <a:ext cx="4462272" cy="246888"/>
+          </a:xfrm>
+          <a:prstGeom prst="roundRect">
+            <a:avLst/>
+          </a:prstGeom>
+          <a:noFill/>
+          <a:ln w="28575" cap="flat" cmpd="sng" algn="ctr">
+            <a:solidFill>
+              <a:srgbClr val="FF0000"/>
+            </a:solidFill>
+            <a:prstDash val="solid"/>
+            <a:round/>
+            <a:headEnd type="none" w="med" len="med"/>
+            <a:tailEnd type="none" w="med" len="med"/>
+          </a:ln>
+        </p:spPr>
+        <p:style>
+          <a:lnRef idx="0">
+            <a:scrgbClr r="0" g="0" b="0"/>
+          </a:lnRef>
+          <a:fillRef idx="0">
+            <a:scrgbClr r="0" g="0" b="0"/>
+          </a:fillRef>
+          <a:effectRef idx="0">
+            <a:scrgbClr r="0" g="0" b="0"/>
+          </a:effectRef>
+          <a:fontRef idx="minor">
+            <a:schemeClr val="accent2"/>
+          </a:fontRef>
+        </p:style>
+        <p:txBody>
+          <a:bodyPr rtlCol="0" anchor="ctr"/>
+          <a:lstStyle/>
+          <a:p>
+            <a:pPr algn="ctr"/>
+            <a:endParaRPr lang="fr-FR"/>
+          </a:p>
+        </p:txBody>
+      </p:sp>
+      <p:sp>
+        <p:nvSpPr>
+          <p:cNvPr id="11" name="Rectangle : coins arrondis 10">
+            <a:extLst>
+              <a:ext uri="{FF2B5EF4-FFF2-40B4-BE49-F238E27FC236}">
+                <a16:creationId xmlns:a16="http://schemas.microsoft.com/office/drawing/2014/main" id="{CA3B4466-6C8E-EE87-70A4-04F5CF30E6D2}"/>
+              </a:ext>
+            </a:extLst>
+          </p:cNvPr>
+          <p:cNvSpPr/>
+          <p:nvPr/>
+        </p:nvSpPr>
+        <p:spPr>
+          <a:xfrm>
+            <a:off x="7653528" y="2219900"/>
+            <a:ext cx="2348267" cy="246888"/>
+          </a:xfrm>
+          <a:prstGeom prst="roundRect">
+            <a:avLst/>
+          </a:prstGeom>
+          <a:noFill/>
+          <a:ln w="28575" cap="flat" cmpd="sng" algn="ctr">
+            <a:solidFill>
+              <a:srgbClr val="FF0000"/>
+            </a:solidFill>
+            <a:prstDash val="solid"/>
+            <a:round/>
+            <a:headEnd type="none" w="med" len="med"/>
+            <a:tailEnd type="none" w="med" len="med"/>
+          </a:ln>
+        </p:spPr>
+        <p:style>
+          <a:lnRef idx="0">
+            <a:scrgbClr r="0" g="0" b="0"/>
+          </a:lnRef>
+          <a:fillRef idx="0">
+            <a:scrgbClr r="0" g="0" b="0"/>
+          </a:fillRef>
+          <a:effectRef idx="0">
+            <a:scrgbClr r="0" g="0" b="0"/>
+          </a:effectRef>
+          <a:fontRef idx="minor">
+            <a:schemeClr val="accent2"/>
+          </a:fontRef>
+        </p:style>
+        <p:txBody>
+          <a:bodyPr rtlCol="0" anchor="ctr"/>
+          <a:lstStyle/>
+          <a:p>
+            <a:pPr algn="ctr"/>
+            <a:endParaRPr lang="fr-FR"/>
+          </a:p>
+        </p:txBody>
+      </p:sp>
+      <p:sp>
+        <p:nvSpPr>
+          <p:cNvPr id="12" name="Rectangle : coins arrondis 11">
+            <a:extLst>
+              <a:ext uri="{FF2B5EF4-FFF2-40B4-BE49-F238E27FC236}">
+                <a16:creationId xmlns:a16="http://schemas.microsoft.com/office/drawing/2014/main" id="{6EC9C408-8D20-2D1C-699B-A7C711CBBEA1}"/>
+              </a:ext>
+            </a:extLst>
+          </p:cNvPr>
+          <p:cNvSpPr/>
+          <p:nvPr/>
+        </p:nvSpPr>
+        <p:spPr>
+          <a:xfrm>
+            <a:off x="7662672" y="3920652"/>
+            <a:ext cx="2348267" cy="246888"/>
+          </a:xfrm>
+          <a:prstGeom prst="roundRect">
+            <a:avLst/>
+          </a:prstGeom>
+          <a:noFill/>
+          <a:ln w="28575" cap="flat" cmpd="sng" algn="ctr">
+            <a:solidFill>
+              <a:srgbClr val="FF0000"/>
+            </a:solidFill>
+            <a:prstDash val="solid"/>
+            <a:round/>
+            <a:headEnd type="none" w="med" len="med"/>
+            <a:tailEnd type="none" w="med" len="med"/>
+          </a:ln>
+        </p:spPr>
+        <p:style>
+          <a:lnRef idx="0">
+            <a:scrgbClr r="0" g="0" b="0"/>
+          </a:lnRef>
+          <a:fillRef idx="0">
+            <a:scrgbClr r="0" g="0" b="0"/>
+          </a:fillRef>
+          <a:effectRef idx="0">
+            <a:scrgbClr r="0" g="0" b="0"/>
+          </a:effectRef>
+          <a:fontRef idx="minor">
+            <a:schemeClr val="accent2"/>
+          </a:fontRef>
+        </p:style>
+        <p:txBody>
+          <a:bodyPr rtlCol="0" anchor="ctr"/>
+          <a:lstStyle/>
+          <a:p>
+            <a:pPr algn="ctr"/>
+            <a:endParaRPr lang="fr-FR"/>
+          </a:p>
+        </p:txBody>
+      </p:sp>
     </p:spTree>
     <p:extLst>
       <p:ext uri="{BB962C8B-B14F-4D97-AF65-F5344CB8AC3E}">
         <p14:creationId xmlns:p14="http://schemas.microsoft.com/office/powerpoint/2010/main" val="2779423324"/>
+      </p:ext>
+    </p:extLst>
+  </p:cSld>
+  <p:clrMapOvr>
+    <a:masterClrMapping/>
+  </p:clrMapOvr>
+</p:sld>
+</file>
+
+<file path=ppt/slides/slide2.xml><?xml version="1.0" encoding="utf-8"?>
+<p:sld xmlns:a="http://schemas.openxmlformats.org/drawingml/2006/main" xmlns:r="http://schemas.openxmlformats.org/officeDocument/2006/relationships" xmlns:p="http://schemas.openxmlformats.org/presentationml/2006/main">
+  <p:cSld>
+    <p:spTree>
+      <p:nvGrpSpPr>
+        <p:cNvPr id="1" name=""/>
+        <p:cNvGrpSpPr/>
+        <p:nvPr/>
+      </p:nvGrpSpPr>
+      <p:grpSpPr>
+        <a:xfrm>
+          <a:off x="0" y="0"/>
+          <a:ext cx="0" cy="0"/>
+          <a:chOff x="0" y="0"/>
+          <a:chExt cx="0" cy="0"/>
+        </a:xfrm>
+      </p:grpSpPr>
+      <p:pic>
+        <p:nvPicPr>
+          <p:cNvPr id="5" name="Image 4">
+            <a:extLst>
+              <a:ext uri="{FF2B5EF4-FFF2-40B4-BE49-F238E27FC236}">
+                <a16:creationId xmlns:a16="http://schemas.microsoft.com/office/drawing/2014/main" id="{1DE9494B-B9B3-4E54-E265-87988B4DFD56}"/>
+              </a:ext>
+            </a:extLst>
+          </p:cNvPr>
+          <p:cNvPicPr>
+            <a:picLocks noChangeAspect="1"/>
+          </p:cNvPicPr>
+          <p:nvPr/>
+        </p:nvPicPr>
+        <p:blipFill>
+          <a:blip r:embed="rId2"/>
+          <a:stretch>
+            <a:fillRect/>
+          </a:stretch>
+        </p:blipFill>
+        <p:spPr>
+          <a:xfrm>
+            <a:off x="318186" y="341323"/>
+            <a:ext cx="7459116" cy="762106"/>
+          </a:xfrm>
+          <a:prstGeom prst="rect">
+            <a:avLst/>
+          </a:prstGeom>
+        </p:spPr>
+      </p:pic>
+      <p:pic>
+        <p:nvPicPr>
+          <p:cNvPr id="7" name="Image 6">
+            <a:extLst>
+              <a:ext uri="{FF2B5EF4-FFF2-40B4-BE49-F238E27FC236}">
+                <a16:creationId xmlns:a16="http://schemas.microsoft.com/office/drawing/2014/main" id="{0839AA3E-E03D-2560-5550-C9DF3598F075}"/>
+              </a:ext>
+            </a:extLst>
+          </p:cNvPr>
+          <p:cNvPicPr>
+            <a:picLocks noChangeAspect="1"/>
+          </p:cNvPicPr>
+          <p:nvPr/>
+        </p:nvPicPr>
+        <p:blipFill>
+          <a:blip r:embed="rId3">
+            <a:extLst>
+              <a:ext uri="{28A0092B-C50C-407E-A947-70E740481C1C}">
+                <a14:useLocalDpi xmlns:a14="http://schemas.microsoft.com/office/drawing/2010/main" val="0"/>
+              </a:ext>
+            </a:extLst>
+          </a:blip>
+          <a:stretch>
+            <a:fillRect/>
+          </a:stretch>
+        </p:blipFill>
+        <p:spPr>
+          <a:xfrm>
+            <a:off x="4209787" y="2919341"/>
+            <a:ext cx="3772426" cy="1019317"/>
+          </a:xfrm>
+          <a:prstGeom prst="rect">
+            <a:avLst/>
+          </a:prstGeom>
+        </p:spPr>
+      </p:pic>
+      <p:pic>
+        <p:nvPicPr>
+          <p:cNvPr id="8" name="Image 7">
+            <a:extLst>
+              <a:ext uri="{FF2B5EF4-FFF2-40B4-BE49-F238E27FC236}">
+                <a16:creationId xmlns:a16="http://schemas.microsoft.com/office/drawing/2014/main" id="{6D31A79D-6FDE-8BBF-3030-ECC0204A2AE5}"/>
+              </a:ext>
+            </a:extLst>
+          </p:cNvPr>
+          <p:cNvPicPr>
+            <a:picLocks noChangeAspect="1"/>
+          </p:cNvPicPr>
+          <p:nvPr/>
+        </p:nvPicPr>
+        <p:blipFill>
+          <a:blip r:embed="rId3">
+            <a:extLst>
+              <a:ext uri="{28A0092B-C50C-407E-A947-70E740481C1C}">
+                <a14:useLocalDpi xmlns:a14="http://schemas.microsoft.com/office/drawing/2010/main" val="0"/>
+              </a:ext>
+            </a:extLst>
+          </a:blip>
+          <a:srcRect r="58322"/>
+          <a:stretch>
+            <a:fillRect/>
+          </a:stretch>
+        </p:blipFill>
+        <p:spPr>
+          <a:xfrm>
+            <a:off x="1682995" y="4543925"/>
+            <a:ext cx="1572269" cy="1019317"/>
+          </a:xfrm>
+          <a:prstGeom prst="rect">
+            <a:avLst/>
+          </a:prstGeom>
+        </p:spPr>
+      </p:pic>
+      <p:grpSp>
+        <p:nvGrpSpPr>
+          <p:cNvPr id="14" name="Groupe 13">
+            <a:extLst>
+              <a:ext uri="{FF2B5EF4-FFF2-40B4-BE49-F238E27FC236}">
+                <a16:creationId xmlns:a16="http://schemas.microsoft.com/office/drawing/2014/main" id="{5AAEF236-1788-828C-EDB6-0E292DF4363E}"/>
+              </a:ext>
+            </a:extLst>
+          </p:cNvPr>
+          <p:cNvGrpSpPr/>
+          <p:nvPr/>
+        </p:nvGrpSpPr>
+        <p:grpSpPr>
+          <a:xfrm>
+            <a:off x="4138155" y="4482003"/>
+            <a:ext cx="2953162" cy="1143160"/>
+            <a:chOff x="4138155" y="4482003"/>
+            <a:chExt cx="2953162" cy="1143160"/>
+          </a:xfrm>
+        </p:grpSpPr>
+        <p:pic>
+          <p:nvPicPr>
+            <p:cNvPr id="10" name="Image 9">
+              <a:extLst>
+                <a:ext uri="{FF2B5EF4-FFF2-40B4-BE49-F238E27FC236}">
+                  <a16:creationId xmlns:a16="http://schemas.microsoft.com/office/drawing/2014/main" id="{DD3B213E-6233-1D5A-1FF3-192CB1D7D214}"/>
+                </a:ext>
+              </a:extLst>
+            </p:cNvPr>
+            <p:cNvPicPr>
+              <a:picLocks noChangeAspect="1"/>
+            </p:cNvPicPr>
+            <p:nvPr/>
+          </p:nvPicPr>
+          <p:blipFill>
+            <a:blip r:embed="rId4">
+              <a:extLst>
+                <a:ext uri="{28A0092B-C50C-407E-A947-70E740481C1C}">
+                  <a14:useLocalDpi xmlns:a14="http://schemas.microsoft.com/office/drawing/2010/main" val="0"/>
+                </a:ext>
+              </a:extLst>
+            </a:blip>
+            <a:stretch>
+              <a:fillRect/>
+            </a:stretch>
+          </p:blipFill>
+          <p:spPr>
+            <a:xfrm>
+              <a:off x="4138155" y="4482003"/>
+              <a:ext cx="2953162" cy="1143160"/>
+            </a:xfrm>
+            <a:prstGeom prst="rect">
+              <a:avLst/>
+            </a:prstGeom>
+          </p:spPr>
+        </p:pic>
+        <p:sp>
+          <p:nvSpPr>
+            <p:cNvPr id="12" name="Rectangle : coins arrondis 11">
+              <a:extLst>
+                <a:ext uri="{FF2B5EF4-FFF2-40B4-BE49-F238E27FC236}">
+                  <a16:creationId xmlns:a16="http://schemas.microsoft.com/office/drawing/2014/main" id="{FA911E64-C349-482A-1298-731060E0A3E6}"/>
+                </a:ext>
+              </a:extLst>
+            </p:cNvPr>
+            <p:cNvSpPr/>
+            <p:nvPr/>
+          </p:nvSpPr>
+          <p:spPr>
+            <a:xfrm>
+              <a:off x="4921867" y="5316354"/>
+              <a:ext cx="2037734" cy="192271"/>
+            </a:xfrm>
+            <a:prstGeom prst="roundRect">
+              <a:avLst/>
+            </a:prstGeom>
+            <a:noFill/>
+            <a:ln w="28575" cap="flat" cmpd="sng" algn="ctr">
+              <a:solidFill>
+                <a:srgbClr val="FF0000"/>
+              </a:solidFill>
+              <a:prstDash val="solid"/>
+              <a:round/>
+              <a:headEnd type="none" w="med" len="med"/>
+              <a:tailEnd type="none" w="med" len="med"/>
+            </a:ln>
+          </p:spPr>
+          <p:style>
+            <a:lnRef idx="0">
+              <a:scrgbClr r="0" g="0" b="0"/>
+            </a:lnRef>
+            <a:fillRef idx="0">
+              <a:scrgbClr r="0" g="0" b="0"/>
+            </a:fillRef>
+            <a:effectRef idx="0">
+              <a:scrgbClr r="0" g="0" b="0"/>
+            </a:effectRef>
+            <a:fontRef idx="minor">
+              <a:schemeClr val="accent2"/>
+            </a:fontRef>
+          </p:style>
+          <p:txBody>
+            <a:bodyPr rtlCol="0" anchor="ctr"/>
+            <a:lstStyle/>
+            <a:p>
+              <a:pPr algn="ctr"/>
+              <a:endParaRPr lang="fr-FR" dirty="0"/>
+            </a:p>
+          </p:txBody>
+        </p:sp>
+        <p:sp>
+          <p:nvSpPr>
+            <p:cNvPr id="13" name="Rectangle : coins arrondis 12">
+              <a:extLst>
+                <a:ext uri="{FF2B5EF4-FFF2-40B4-BE49-F238E27FC236}">
+                  <a16:creationId xmlns:a16="http://schemas.microsoft.com/office/drawing/2014/main" id="{F82B3A42-66B8-D1CB-0155-B935FEF05C37}"/>
+                </a:ext>
+              </a:extLst>
+            </p:cNvPr>
+            <p:cNvSpPr/>
+            <p:nvPr/>
+          </p:nvSpPr>
+          <p:spPr>
+            <a:xfrm>
+              <a:off x="4639291" y="4580738"/>
+              <a:ext cx="2320309" cy="192271"/>
+            </a:xfrm>
+            <a:prstGeom prst="roundRect">
+              <a:avLst/>
+            </a:prstGeom>
+            <a:noFill/>
+            <a:ln w="28575" cap="flat" cmpd="sng" algn="ctr">
+              <a:solidFill>
+                <a:srgbClr val="FF0000"/>
+              </a:solidFill>
+              <a:prstDash val="solid"/>
+              <a:round/>
+              <a:headEnd type="none" w="med" len="med"/>
+              <a:tailEnd type="none" w="med" len="med"/>
+            </a:ln>
+          </p:spPr>
+          <p:style>
+            <a:lnRef idx="0">
+              <a:scrgbClr r="0" g="0" b="0"/>
+            </a:lnRef>
+            <a:fillRef idx="0">
+              <a:scrgbClr r="0" g="0" b="0"/>
+            </a:fillRef>
+            <a:effectRef idx="0">
+              <a:scrgbClr r="0" g="0" b="0"/>
+            </a:effectRef>
+            <a:fontRef idx="minor">
+              <a:schemeClr val="accent2"/>
+            </a:fontRef>
+          </p:style>
+          <p:txBody>
+            <a:bodyPr rtlCol="0" anchor="ctr"/>
+            <a:lstStyle/>
+            <a:p>
+              <a:pPr algn="ctr"/>
+              <a:endParaRPr lang="fr-FR"/>
+            </a:p>
+          </p:txBody>
+        </p:sp>
+      </p:grpSp>
+      <p:pic>
+        <p:nvPicPr>
+          <p:cNvPr id="20" name="Image 19">
+            <a:extLst>
+              <a:ext uri="{FF2B5EF4-FFF2-40B4-BE49-F238E27FC236}">
+                <a16:creationId xmlns:a16="http://schemas.microsoft.com/office/drawing/2014/main" id="{6DD06F6D-1959-A140-3A5D-CB4651DFB998}"/>
+              </a:ext>
+            </a:extLst>
+          </p:cNvPr>
+          <p:cNvPicPr>
+            <a:picLocks noChangeAspect="1"/>
+          </p:cNvPicPr>
+          <p:nvPr/>
+        </p:nvPicPr>
+        <p:blipFill>
+          <a:blip r:embed="rId5">
+            <a:extLst>
+              <a:ext uri="{28A0092B-C50C-407E-A947-70E740481C1C}">
+                <a14:useLocalDpi xmlns:a14="http://schemas.microsoft.com/office/drawing/2010/main" val="0"/>
+              </a:ext>
+            </a:extLst>
+          </a:blip>
+          <a:stretch>
+            <a:fillRect/>
+          </a:stretch>
+        </p:blipFill>
+        <p:spPr>
+          <a:xfrm>
+            <a:off x="8151494" y="2186158"/>
+            <a:ext cx="2876951" cy="2295845"/>
+          </a:xfrm>
+          <a:prstGeom prst="rect">
+            <a:avLst/>
+          </a:prstGeom>
+        </p:spPr>
+      </p:pic>
+    </p:spTree>
+    <p:extLst>
+      <p:ext uri="{BB962C8B-B14F-4D97-AF65-F5344CB8AC3E}">
+        <p14:creationId xmlns:p14="http://schemas.microsoft.com/office/powerpoint/2010/main" val="352205092"/>
       </p:ext>
     </p:extLst>
   </p:cSld>
